--- a/Slides/Week 2. Niches_and_Distributions.pptx
+++ b/Slides/Week 2. Niches_and_Distributions.pptx
@@ -3672,7 +3672,7 @@
                   </a:schemeClr>
                 </a:solidFill>
               </a:rPr>
-              <a:t>ESSM</a:t>
+              <a:t>ECCB</a:t>
             </a:r>
             <a:r>
               <a:rPr lang="en-US" sz="1000" baseline="0" dirty="0">
